--- a/dist/초3/영어/소리와문자/초3_영어_소리와문자_02_알파벳N부터Z까지.pptx
+++ b/dist/초3/영어/소리와문자/초3_영어_소리와문자_02_알파벳N부터Z까지.pptx
@@ -123,13 +123,13 @@
   <p:extLst>
     <p:ext uri="{521415D9-36F7-43E2-AB2F-B90AF26B5E84}">
       <p14:sectionLst xmlns:p14="http://schemas.microsoft.com/office/powerpoint/2010/main">
-        <p14:section name="도입" id="{a53cf1cc-6134-5e99-538f-9da17787e2b9}">
+        <p14:section name="도입" id="{abae5b43-a427-64a0-8867-a9e57e2b53d8}">
           <p14:sldIdLst>
             <p14:sldId id="256"/>
             <p14:sldId id="257"/>
           </p14:sldIdLst>
         </p14:section>
-        <p14:section name="개념" id="{509a7a6e-96a3-8241-26c3-4428cc5bf159}">
+        <p14:section name="개념" id="{707c9c0c-4dbd-a00a-6b29-bda1715ae5cb}">
           <p14:sldIdLst>
             <p14:sldId id="258"/>
             <p14:sldId id="259"/>
@@ -140,26 +140,26 @@
             <p14:sldId id="264"/>
           </p14:sldIdLst>
         </p14:section>
-        <p14:section name="연습" id="{29af8d8e-acec-d030-26e0-0e219104d0c6}">
+        <p14:section name="연습" id="{e82e6f4e-115d-2ae4-616d-bca77afda6c4}">
           <p14:sldIdLst>
             <p14:sldId id="265"/>
             <p14:sldId id="266"/>
             <p14:sldId id="267"/>
           </p14:sldIdLst>
         </p14:section>
-        <p14:section name="확인" id="{d67ec329-b3e2-6da0-1df1-6e0f60243497}">
+        <p14:section name="확인" id="{817e3ce8-bda2-375a-1f6c-c3845efc190a}">
           <p14:sldIdLst>
             <p14:sldId id="268"/>
             <p14:sldId id="269"/>
             <p14:sldId id="270"/>
           </p14:sldIdLst>
         </p14:section>
-        <p14:section name="정리" id="{d8a4e217-5f31-27a7-7752-6240007f7a28}">
+        <p14:section name="정리" id="{df7065aa-1ad2-ac66-eea9-665b67e41238}">
           <p14:sldIdLst>
             <p14:sldId id="271"/>
           </p14:sldIdLst>
         </p14:section>
-        <p14:section name="보충" id="{23b55c64-6454-9bb0-904f-bb09576607b2}">
+        <p14:section name="보충" id="{562d48c8-bdcc-f86d-459d-02293389fe83}">
           <p14:sldIdLst>
             <p14:sldId id="272"/>
           </p14:sldIdLst>
@@ -3367,7 +3367,7 @@
               <a:buNone/>
             </a:pPr>
             <a:r>
-              <a:rPr lang="ko-KR" altLang="en-US" sz="5900" b="1" dirty="0">
+              <a:rPr lang="en-US" altLang="ko-KR" sz="5900" b="1" dirty="0">
                 <a:solidFill>
                   <a:srgbClr val="1F2937"/>
                 </a:solidFill>
@@ -3414,7 +3414,7 @@
               <a:buNone/>
             </a:pPr>
             <a:r>
-              <a:rPr lang="ko-KR" altLang="en-US" sz="5900" b="1" dirty="0">
+              <a:rPr lang="en-US" altLang="ko-KR" sz="5900" b="1" dirty="0">
                 <a:solidFill>
                   <a:srgbClr val="1F2937"/>
                 </a:solidFill>
@@ -3461,7 +3461,7 @@
               <a:buNone/>
             </a:pPr>
             <a:r>
-              <a:rPr lang="ko-KR" altLang="en-US" sz="5900" b="1" dirty="0">
+              <a:rPr lang="en-US" altLang="ko-KR" sz="5900" b="1" dirty="0">
                 <a:solidFill>
                   <a:srgbClr val="1F2937"/>
                 </a:solidFill>
@@ -3508,7 +3508,7 @@
               <a:buNone/>
             </a:pPr>
             <a:r>
-              <a:rPr lang="ko-KR" altLang="en-US" sz="5900" b="1" dirty="0">
+              <a:rPr lang="en-US" altLang="ko-KR" sz="5900" b="1" dirty="0">
                 <a:solidFill>
                   <a:srgbClr val="1F2937"/>
                 </a:solidFill>
@@ -3769,7 +3769,7 @@
               <a:buNone/>
             </a:pPr>
             <a:r>
-              <a:rPr lang="ko-KR" altLang="en-US" sz="5900" b="1" dirty="0">
+              <a:rPr lang="en-US" altLang="ko-KR" sz="5900" b="1" dirty="0">
                 <a:solidFill>
                   <a:srgbClr val="1F2937"/>
                 </a:solidFill>
@@ -3816,7 +3816,7 @@
               <a:buNone/>
             </a:pPr>
             <a:r>
-              <a:rPr lang="ko-KR" altLang="en-US" sz="5900" b="1" dirty="0">
+              <a:rPr lang="en-US" altLang="ko-KR" sz="5900" b="1" dirty="0">
                 <a:solidFill>
                   <a:srgbClr val="1F2937"/>
                 </a:solidFill>
@@ -3863,7 +3863,7 @@
               <a:buNone/>
             </a:pPr>
             <a:r>
-              <a:rPr lang="ko-KR" altLang="en-US" sz="5900" b="1" dirty="0">
+              <a:rPr lang="en-US" altLang="ko-KR" sz="5900" b="1" dirty="0">
                 <a:solidFill>
                   <a:srgbClr val="1F2937"/>
                 </a:solidFill>
@@ -3910,7 +3910,7 @@
               <a:buNone/>
             </a:pPr>
             <a:r>
-              <a:rPr lang="ko-KR" altLang="en-US" sz="5900" b="1" dirty="0">
+              <a:rPr lang="en-US" altLang="ko-KR" sz="5900" b="1" dirty="0">
                 <a:solidFill>
                   <a:srgbClr val="1F2937"/>
                 </a:solidFill>
@@ -3957,7 +3957,7 @@
               <a:buNone/>
             </a:pPr>
             <a:r>
-              <a:rPr lang="ko-KR" altLang="en-US" sz="5900" b="1" dirty="0">
+              <a:rPr lang="en-US" altLang="ko-KR" sz="5900" b="1" dirty="0">
                 <a:solidFill>
                   <a:srgbClr val="1F2937"/>
                 </a:solidFill>
@@ -4004,7 +4004,7 @@
               <a:buNone/>
             </a:pPr>
             <a:r>
-              <a:rPr lang="ko-KR" altLang="en-US" sz="5900" b="1" dirty="0">
+              <a:rPr lang="en-US" altLang="ko-KR" sz="5900" b="1" dirty="0">
                 <a:solidFill>
                   <a:srgbClr val="1F2937"/>
                 </a:solidFill>
@@ -4051,7 +4051,7 @@
               <a:buNone/>
             </a:pPr>
             <a:r>
-              <a:rPr lang="ko-KR" altLang="en-US" sz="5900" b="1" dirty="0">
+              <a:rPr lang="en-US" altLang="ko-KR" sz="5900" b="1" dirty="0">
                 <a:solidFill>
                   <a:srgbClr val="1F2937"/>
                 </a:solidFill>
@@ -4098,7 +4098,7 @@
               <a:buNone/>
             </a:pPr>
             <a:r>
-              <a:rPr lang="ko-KR" altLang="en-US" sz="5900" b="1" dirty="0">
+              <a:rPr lang="en-US" altLang="ko-KR" sz="5900" b="1" dirty="0">
                 <a:solidFill>
                   <a:srgbClr val="1F2937"/>
                 </a:solidFill>
@@ -4145,7 +4145,7 @@
               <a:buNone/>
             </a:pPr>
             <a:r>
-              <a:rPr lang="ko-KR" altLang="en-US" sz="5900" b="1" dirty="0">
+              <a:rPr lang="en-US" altLang="ko-KR" sz="5900" b="1" dirty="0">
                 <a:solidFill>
                   <a:srgbClr val="1F2937"/>
                 </a:solidFill>
@@ -4192,7 +4192,7 @@
               <a:buNone/>
             </a:pPr>
             <a:r>
-              <a:rPr lang="ko-KR" altLang="en-US" sz="5900" b="1" dirty="0">
+              <a:rPr lang="en-US" altLang="ko-KR" sz="5900" b="1" dirty="0">
                 <a:solidFill>
                   <a:srgbClr val="1F2937"/>
                 </a:solidFill>
@@ -4239,7 +4239,7 @@
               <a:buNone/>
             </a:pPr>
             <a:r>
-              <a:rPr lang="ko-KR" altLang="en-US" sz="5900" b="1" dirty="0">
+              <a:rPr lang="en-US" altLang="ko-KR" sz="5900" b="1" dirty="0">
                 <a:solidFill>
                   <a:srgbClr val="1F2937"/>
                 </a:solidFill>
@@ -4286,7 +4286,7 @@
               <a:buNone/>
             </a:pPr>
             <a:r>
-              <a:rPr lang="ko-KR" altLang="en-US" sz="5900" b="1" dirty="0">
+              <a:rPr lang="en-US" altLang="ko-KR" sz="5900" b="1" dirty="0">
                 <a:solidFill>
                   <a:srgbClr val="1F2937"/>
                 </a:solidFill>
@@ -4333,7 +4333,7 @@
               <a:buNone/>
             </a:pPr>
             <a:r>
-              <a:rPr lang="ko-KR" altLang="en-US" sz="5900" b="1" dirty="0">
+              <a:rPr lang="en-US" altLang="ko-KR" sz="5900" b="1" dirty="0">
                 <a:solidFill>
                   <a:srgbClr val="1F2937"/>
                 </a:solidFill>
@@ -4679,7 +4679,7 @@
               <a:buNone/>
             </a:pPr>
             <a:r>
-              <a:rPr lang="ko-KR" altLang="en-US" sz="5900" b="1" dirty="0">
+              <a:rPr lang="en-US" altLang="ko-KR" sz="5900" b="1" dirty="0">
                 <a:solidFill>
                   <a:srgbClr val="1F2937"/>
                 </a:solidFill>
@@ -4773,7 +4773,7 @@
               <a:buNone/>
             </a:pPr>
             <a:r>
-              <a:rPr lang="ko-KR" altLang="en-US" sz="5900" b="1" dirty="0">
+              <a:rPr lang="en-US" altLang="ko-KR" sz="5900" b="1" dirty="0">
                 <a:solidFill>
                   <a:srgbClr val="1F2937"/>
                 </a:solidFill>
@@ -5089,7 +5089,7 @@
               <a:buNone/>
             </a:pPr>
             <a:r>
-              <a:rPr lang="ko-KR" altLang="en-US" sz="4000" b="1" dirty="0">
+              <a:rPr lang="en-US" altLang="ko-KR" sz="4000" b="1" dirty="0">
                 <a:solidFill>
                   <a:srgbClr val="1F2937"/>
                 </a:solidFill>
@@ -5136,7 +5136,7 @@
               <a:buNone/>
             </a:pPr>
             <a:r>
-              <a:rPr lang="ko-KR" altLang="en-US" sz="4000" b="1" dirty="0">
+              <a:rPr lang="en-US" altLang="ko-KR" sz="4000" b="1" dirty="0">
                 <a:solidFill>
                   <a:srgbClr val="1F2937"/>
                 </a:solidFill>
@@ -5230,7 +5230,7 @@
               <a:buNone/>
             </a:pPr>
             <a:r>
-              <a:rPr lang="ko-KR" altLang="en-US" sz="4000" b="1" dirty="0">
+              <a:rPr lang="en-US" altLang="ko-KR" sz="4000" b="1" dirty="0">
                 <a:solidFill>
                   <a:srgbClr val="1F2937"/>
                 </a:solidFill>
@@ -5324,7 +5324,7 @@
               <a:buNone/>
             </a:pPr>
             <a:r>
-              <a:rPr lang="ko-KR" altLang="en-US" sz="4000" b="1" dirty="0">
+              <a:rPr lang="en-US" altLang="ko-KR" sz="4000" b="1" dirty="0">
                 <a:solidFill>
                   <a:srgbClr val="1F2937"/>
                 </a:solidFill>
@@ -5371,7 +5371,7 @@
               <a:buNone/>
             </a:pPr>
             <a:r>
-              <a:rPr lang="ko-KR" altLang="en-US" sz="4000" b="1" dirty="0">
+              <a:rPr lang="en-US" altLang="ko-KR" sz="4000" b="1" dirty="0">
                 <a:solidFill>
                   <a:srgbClr val="1F2937"/>
                 </a:solidFill>
@@ -5465,7 +5465,7 @@
               <a:buNone/>
             </a:pPr>
             <a:r>
-              <a:rPr lang="ko-KR" altLang="en-US" sz="4000" b="1" dirty="0">
+              <a:rPr lang="en-US" altLang="ko-KR" sz="4000" b="1" dirty="0">
                 <a:solidFill>
                   <a:srgbClr val="1F2937"/>
                 </a:solidFill>
@@ -5559,7 +5559,7 @@
               <a:buNone/>
             </a:pPr>
             <a:r>
-              <a:rPr lang="ko-KR" altLang="en-US" sz="4000" b="1" dirty="0">
+              <a:rPr lang="en-US" altLang="ko-KR" sz="4000" b="1" dirty="0">
                 <a:solidFill>
                   <a:srgbClr val="1F2937"/>
                 </a:solidFill>
@@ -5653,7 +5653,7 @@
               <a:buNone/>
             </a:pPr>
             <a:r>
-              <a:rPr lang="ko-KR" altLang="en-US" sz="4000" b="1" dirty="0">
+              <a:rPr lang="en-US" altLang="ko-KR" sz="4000" b="1" dirty="0">
                 <a:solidFill>
                   <a:srgbClr val="1F2937"/>
                 </a:solidFill>
@@ -5700,7 +5700,7 @@
               <a:buNone/>
             </a:pPr>
             <a:r>
-              <a:rPr lang="ko-KR" altLang="en-US" sz="4000" b="1" dirty="0">
+              <a:rPr lang="en-US" altLang="ko-KR" sz="4000" b="1" dirty="0">
                 <a:solidFill>
                   <a:srgbClr val="1F2937"/>
                 </a:solidFill>
@@ -5947,7 +5947,7 @@
               <a:buNone/>
             </a:pPr>
             <a:r>
-              <a:rPr lang="ko-KR" altLang="en-US" sz="5900" b="1" dirty="0">
+              <a:rPr lang="en-US" altLang="ko-KR" sz="5900" b="1" dirty="0">
                 <a:solidFill>
                   <a:srgbClr val="1F2937"/>
                 </a:solidFill>
@@ -5994,7 +5994,7 @@
               <a:buNone/>
             </a:pPr>
             <a:r>
-              <a:rPr lang="ko-KR" altLang="en-US" sz="5900" b="1" dirty="0">
+              <a:rPr lang="en-US" altLang="ko-KR" sz="5900" b="1" dirty="0">
                 <a:solidFill>
                   <a:srgbClr val="1F2937"/>
                 </a:solidFill>
@@ -6041,7 +6041,7 @@
               <a:buNone/>
             </a:pPr>
             <a:r>
-              <a:rPr lang="ko-KR" altLang="en-US" sz="5900" b="1" dirty="0">
+              <a:rPr lang="en-US" altLang="ko-KR" sz="5900" b="1" dirty="0">
                 <a:solidFill>
                   <a:srgbClr val="1F2937"/>
                 </a:solidFill>
@@ -6135,7 +6135,7 @@
               <a:buNone/>
             </a:pPr>
             <a:r>
-              <a:rPr lang="ko-KR" altLang="en-US" sz="5900" b="1" dirty="0">
+              <a:rPr lang="en-US" altLang="ko-KR" sz="5900" b="1" dirty="0">
                 <a:solidFill>
                   <a:srgbClr val="1F2937"/>
                 </a:solidFill>
@@ -6182,7 +6182,7 @@
               <a:buNone/>
             </a:pPr>
             <a:r>
-              <a:rPr lang="ko-KR" altLang="en-US" sz="5900" b="1" dirty="0">
+              <a:rPr lang="en-US" altLang="ko-KR" sz="5900" b="1" dirty="0">
                 <a:solidFill>
                   <a:srgbClr val="1F2937"/>
                 </a:solidFill>
@@ -6229,7 +6229,7 @@
               <a:buNone/>
             </a:pPr>
             <a:r>
-              <a:rPr lang="ko-KR" altLang="en-US" sz="5900" b="1" dirty="0">
+              <a:rPr lang="en-US" altLang="ko-KR" sz="5900" b="1" dirty="0">
                 <a:solidFill>
                   <a:srgbClr val="1F2937"/>
                 </a:solidFill>
@@ -6323,7 +6323,7 @@
               <a:buNone/>
             </a:pPr>
             <a:r>
-              <a:rPr lang="ko-KR" altLang="en-US" sz="5900" b="1" dirty="0">
+              <a:rPr lang="en-US" altLang="ko-KR" sz="5900" b="1" dirty="0">
                 <a:solidFill>
                   <a:srgbClr val="1F2937"/>
                 </a:solidFill>
@@ -6417,7 +6417,7 @@
               <a:buNone/>
             </a:pPr>
             <a:r>
-              <a:rPr lang="ko-KR" altLang="en-US" sz="5900" b="1" dirty="0">
+              <a:rPr lang="en-US" altLang="ko-KR" sz="5900" b="1" dirty="0">
                 <a:solidFill>
                   <a:srgbClr val="1F2937"/>
                 </a:solidFill>
@@ -6511,7 +6511,7 @@
               <a:buNone/>
             </a:pPr>
             <a:r>
-              <a:rPr lang="ko-KR" altLang="en-US" sz="5900" b="1" dirty="0">
+              <a:rPr lang="en-US" altLang="ko-KR" sz="5900" b="1" dirty="0">
                 <a:solidFill>
                   <a:srgbClr val="1F2937"/>
                 </a:solidFill>
@@ -6558,7 +6558,7 @@
               <a:buNone/>
             </a:pPr>
             <a:r>
-              <a:rPr lang="ko-KR" altLang="en-US" sz="5900" b="1" dirty="0">
+              <a:rPr lang="en-US" altLang="ko-KR" sz="5900" b="1" dirty="0">
                 <a:solidFill>
                   <a:srgbClr val="1F2937"/>
                 </a:solidFill>
@@ -6605,7 +6605,7 @@
               <a:buNone/>
             </a:pPr>
             <a:r>
-              <a:rPr lang="ko-KR" altLang="en-US" sz="5900" b="1" dirty="0">
+              <a:rPr lang="en-US" altLang="ko-KR" sz="5900" b="1" dirty="0">
                 <a:solidFill>
                   <a:srgbClr val="1F2937"/>
                 </a:solidFill>
@@ -6874,7 +6874,7 @@
               <a:buNone/>
             </a:pPr>
             <a:r>
-              <a:rPr lang="ko-KR" altLang="en-US" sz="3000" dirty="0">
+              <a:rPr lang="en-US" altLang="ko-KR" sz="3000" dirty="0">
                 <a:solidFill>
                   <a:srgbClr val="1F2937"/>
                 </a:solidFill>
@@ -6891,7 +6891,7 @@
               <a:buNone/>
             </a:pPr>
             <a:r>
-              <a:rPr lang="ko-KR" altLang="en-US" sz="3000" dirty="0">
+              <a:rPr lang="en-US" altLang="ko-KR" sz="3000" dirty="0">
                 <a:solidFill>
                   <a:srgbClr val="1F2937"/>
                 </a:solidFill>
@@ -6969,7 +6969,7 @@
               <a:buNone/>
             </a:pPr>
             <a:r>
-              <a:rPr lang="ko-KR" altLang="en-US" sz="3000" dirty="0">
+              <a:rPr lang="en-US" altLang="ko-KR" sz="3000" dirty="0">
                 <a:solidFill>
                   <a:srgbClr val="1F2937"/>
                 </a:solidFill>
@@ -7047,7 +7047,7 @@
               <a:buNone/>
             </a:pPr>
             <a:r>
-              <a:rPr lang="ko-KR" altLang="en-US" sz="3000" dirty="0">
+              <a:rPr lang="en-US" altLang="ko-KR" sz="3000" dirty="0">
                 <a:solidFill>
                   <a:srgbClr val="1F2937"/>
                 </a:solidFill>
@@ -7644,7 +7644,7 @@
               <a:buNone/>
             </a:pPr>
             <a:r>
-              <a:rPr lang="ko-KR" altLang="en-US" sz="6300" b="1" dirty="0">
+              <a:rPr lang="en-US" altLang="ko-KR" sz="6300" b="1" dirty="0">
                 <a:solidFill>
                   <a:srgbClr val="1F2937"/>
                 </a:solidFill>
@@ -7738,7 +7738,7 @@
               <a:buNone/>
             </a:pPr>
             <a:r>
-              <a:rPr lang="ko-KR" altLang="en-US" sz="6300" b="1" dirty="0">
+              <a:rPr lang="en-US" altLang="ko-KR" sz="6300" b="1" dirty="0">
                 <a:solidFill>
                   <a:srgbClr val="1F2937"/>
                 </a:solidFill>
@@ -7832,7 +7832,7 @@
               <a:buNone/>
             </a:pPr>
             <a:r>
-              <a:rPr lang="ko-KR" altLang="en-US" sz="6300" b="1" dirty="0">
+              <a:rPr lang="en-US" altLang="ko-KR" sz="6300" b="1" dirty="0">
                 <a:solidFill>
                   <a:srgbClr val="1F2937"/>
                 </a:solidFill>
@@ -7926,7 +7926,7 @@
               <a:buNone/>
             </a:pPr>
             <a:r>
-              <a:rPr lang="ko-KR" altLang="en-US" sz="6300" b="1" dirty="0">
+              <a:rPr lang="en-US" altLang="ko-KR" sz="6300" b="1" dirty="0">
                 <a:solidFill>
                   <a:srgbClr val="1F2937"/>
                 </a:solidFill>
@@ -8717,7 +8717,7 @@
               <a:buNone/>
             </a:pPr>
             <a:r>
-              <a:rPr lang="ko-KR" altLang="en-US" sz="5100" b="1" dirty="0">
+              <a:rPr lang="en-US" altLang="ko-KR" sz="5100" b="1" dirty="0">
                 <a:solidFill>
                   <a:srgbClr val="1F2937"/>
                 </a:solidFill>
@@ -8764,7 +8764,7 @@
               <a:buNone/>
             </a:pPr>
             <a:r>
-              <a:rPr lang="ko-KR" altLang="en-US" sz="5100" b="1" dirty="0">
+              <a:rPr lang="en-US" altLang="ko-KR" sz="5100" b="1" dirty="0">
                 <a:solidFill>
                   <a:srgbClr val="1F2937"/>
                 </a:solidFill>
@@ -8811,7 +8811,7 @@
               <a:buNone/>
             </a:pPr>
             <a:r>
-              <a:rPr lang="ko-KR" altLang="en-US" sz="5100" b="1" dirty="0">
+              <a:rPr lang="en-US" altLang="ko-KR" sz="5100" b="1" dirty="0">
                 <a:solidFill>
                   <a:srgbClr val="1F2937"/>
                 </a:solidFill>
@@ -8858,7 +8858,7 @@
               <a:buNone/>
             </a:pPr>
             <a:r>
-              <a:rPr lang="ko-KR" altLang="en-US" sz="5100" b="1" dirty="0">
+              <a:rPr lang="en-US" altLang="ko-KR" sz="5100" b="1" dirty="0">
                 <a:solidFill>
                   <a:srgbClr val="1F2937"/>
                 </a:solidFill>
@@ -8905,7 +8905,7 @@
               <a:buNone/>
             </a:pPr>
             <a:r>
-              <a:rPr lang="ko-KR" altLang="en-US" sz="5100" b="1" dirty="0">
+              <a:rPr lang="en-US" altLang="ko-KR" sz="5100" b="1" dirty="0">
                 <a:solidFill>
                   <a:srgbClr val="1F2937"/>
                 </a:solidFill>
@@ -8952,7 +8952,7 @@
               <a:buNone/>
             </a:pPr>
             <a:r>
-              <a:rPr lang="ko-KR" altLang="en-US" sz="5100" b="1" dirty="0">
+              <a:rPr lang="en-US" altLang="ko-KR" sz="5100" b="1" dirty="0">
                 <a:solidFill>
                   <a:srgbClr val="1F2937"/>
                 </a:solidFill>
@@ -8999,7 +8999,7 @@
               <a:buNone/>
             </a:pPr>
             <a:r>
-              <a:rPr lang="ko-KR" altLang="en-US" sz="5100" b="1" dirty="0">
+              <a:rPr lang="en-US" altLang="ko-KR" sz="5100" b="1" dirty="0">
                 <a:solidFill>
                   <a:srgbClr val="1F2937"/>
                 </a:solidFill>
@@ -9046,7 +9046,7 @@
               <a:buNone/>
             </a:pPr>
             <a:r>
-              <a:rPr lang="ko-KR" altLang="en-US" sz="5100" b="1" dirty="0">
+              <a:rPr lang="en-US" altLang="ko-KR" sz="5100" b="1" dirty="0">
                 <a:solidFill>
                   <a:srgbClr val="1F2937"/>
                 </a:solidFill>
@@ -9093,7 +9093,7 @@
               <a:buNone/>
             </a:pPr>
             <a:r>
-              <a:rPr lang="ko-KR" altLang="en-US" sz="5100" b="1" dirty="0">
+              <a:rPr lang="en-US" altLang="ko-KR" sz="5100" b="1" dirty="0">
                 <a:solidFill>
                   <a:srgbClr val="1F2937"/>
                 </a:solidFill>
@@ -9140,7 +9140,7 @@
               <a:buNone/>
             </a:pPr>
             <a:r>
-              <a:rPr lang="ko-KR" altLang="en-US" sz="5100" b="1" dirty="0">
+              <a:rPr lang="en-US" altLang="ko-KR" sz="5100" b="1" dirty="0">
                 <a:solidFill>
                   <a:srgbClr val="1F2937"/>
                 </a:solidFill>
@@ -9187,7 +9187,7 @@
               <a:buNone/>
             </a:pPr>
             <a:r>
-              <a:rPr lang="ko-KR" altLang="en-US" sz="5100" b="1" dirty="0">
+              <a:rPr lang="en-US" altLang="ko-KR" sz="5100" b="1" dirty="0">
                 <a:solidFill>
                   <a:srgbClr val="1F2937"/>
                 </a:solidFill>
@@ -9234,7 +9234,7 @@
               <a:buNone/>
             </a:pPr>
             <a:r>
-              <a:rPr lang="ko-KR" altLang="en-US" sz="5100" b="1" dirty="0">
+              <a:rPr lang="en-US" altLang="ko-KR" sz="5100" b="1" dirty="0">
                 <a:solidFill>
                   <a:srgbClr val="1F2937"/>
                 </a:solidFill>
@@ -9281,7 +9281,7 @@
               <a:buNone/>
             </a:pPr>
             <a:r>
-              <a:rPr lang="ko-KR" altLang="en-US" sz="5100" b="1" dirty="0">
+              <a:rPr lang="en-US" altLang="ko-KR" sz="5100" b="1" dirty="0">
                 <a:solidFill>
                   <a:srgbClr val="1F2937"/>
                 </a:solidFill>
@@ -9528,7 +9528,7 @@
               <a:buNone/>
             </a:pPr>
             <a:r>
-              <a:rPr lang="ko-KR" altLang="en-US" sz="5300" b="1" dirty="0">
+              <a:rPr lang="en-US" altLang="ko-KR" sz="5300" b="1" dirty="0">
                 <a:solidFill>
                   <a:srgbClr val="1F2937"/>
                 </a:solidFill>
@@ -9575,7 +9575,7 @@
               <a:buNone/>
             </a:pPr>
             <a:r>
-              <a:rPr lang="ko-KR" altLang="en-US" sz="5300" b="1" dirty="0">
+              <a:rPr lang="en-US" altLang="ko-KR" sz="5300" b="1" dirty="0">
                 <a:solidFill>
                   <a:srgbClr val="1F2937"/>
                 </a:solidFill>
@@ -9622,7 +9622,7 @@
               <a:buNone/>
             </a:pPr>
             <a:r>
-              <a:rPr lang="ko-KR" altLang="en-US" sz="5300" b="1" dirty="0">
+              <a:rPr lang="en-US" altLang="ko-KR" sz="5300" b="1" dirty="0">
                 <a:solidFill>
                   <a:srgbClr val="1F2937"/>
                 </a:solidFill>
@@ -9669,7 +9669,7 @@
               <a:buNone/>
             </a:pPr>
             <a:r>
-              <a:rPr lang="ko-KR" altLang="en-US" sz="5300" b="1" dirty="0">
+              <a:rPr lang="en-US" altLang="ko-KR" sz="5300" b="1" dirty="0">
                 <a:solidFill>
                   <a:srgbClr val="1F2937"/>
                 </a:solidFill>
@@ -9763,7 +9763,7 @@
               <a:buNone/>
             </a:pPr>
             <a:r>
-              <a:rPr lang="ko-KR" altLang="en-US" sz="5900" b="1" dirty="0">
+              <a:rPr lang="en-US" altLang="ko-KR" sz="5900" b="1" dirty="0">
                 <a:solidFill>
                   <a:srgbClr val="1F2937"/>
                 </a:solidFill>
@@ -9810,7 +9810,7 @@
               <a:buNone/>
             </a:pPr>
             <a:r>
-              <a:rPr lang="ko-KR" altLang="en-US" sz="5900" b="1" dirty="0">
+              <a:rPr lang="en-US" altLang="ko-KR" sz="5900" b="1" dirty="0">
                 <a:solidFill>
                   <a:srgbClr val="1F2937"/>
                 </a:solidFill>
@@ -10225,7 +10225,7 @@
               <a:buNone/>
             </a:pPr>
             <a:r>
-              <a:rPr lang="ko-KR" altLang="en-US" sz="7900" b="1" dirty="0">
+              <a:rPr lang="en-US" altLang="ko-KR" sz="7900" b="1" dirty="0">
                 <a:solidFill>
                   <a:srgbClr val="1F2937"/>
                 </a:solidFill>
@@ -10272,7 +10272,7 @@
               <a:buNone/>
             </a:pPr>
             <a:r>
-              <a:rPr lang="ko-KR" altLang="en-US" sz="7900" b="1" dirty="0">
+              <a:rPr lang="en-US" altLang="ko-KR" sz="7900" b="1" dirty="0">
                 <a:solidFill>
                   <a:srgbClr val="1F2937"/>
                 </a:solidFill>
@@ -10571,7 +10571,7 @@
               <a:buNone/>
             </a:pPr>
             <a:r>
-              <a:rPr lang="ko-KR" altLang="en-US" sz="8700" b="1" dirty="0">
+              <a:rPr lang="en-US" altLang="ko-KR" sz="8700" b="1" dirty="0">
                 <a:solidFill>
                   <a:srgbClr val="1F2937"/>
                 </a:solidFill>
@@ -10618,7 +10618,7 @@
               <a:buNone/>
             </a:pPr>
             <a:r>
-              <a:rPr lang="ko-KR" altLang="en-US" sz="8700" b="1" dirty="0">
+              <a:rPr lang="en-US" altLang="ko-KR" sz="8700" b="1" dirty="0">
                 <a:solidFill>
                   <a:srgbClr val="1F2937"/>
                 </a:solidFill>
@@ -10917,7 +10917,7 @@
               <a:buNone/>
             </a:pPr>
             <a:r>
-              <a:rPr lang="ko-KR" altLang="en-US" sz="8700" b="1" dirty="0">
+              <a:rPr lang="en-US" altLang="ko-KR" sz="8700" b="1" dirty="0">
                 <a:solidFill>
                   <a:srgbClr val="1F2937"/>
                 </a:solidFill>
@@ -10964,7 +10964,7 @@
               <a:buNone/>
             </a:pPr>
             <a:r>
-              <a:rPr lang="ko-KR" altLang="en-US" sz="8700" b="1" dirty="0">
+              <a:rPr lang="en-US" altLang="ko-KR" sz="8700" b="1" dirty="0">
                 <a:solidFill>
                   <a:srgbClr val="1F2937"/>
                 </a:solidFill>
@@ -11263,7 +11263,7 @@
               <a:buNone/>
             </a:pPr>
             <a:r>
-              <a:rPr lang="ko-KR" altLang="en-US" sz="8700" b="1" dirty="0">
+              <a:rPr lang="en-US" altLang="ko-KR" sz="8700" b="1" dirty="0">
                 <a:solidFill>
                   <a:srgbClr val="1F2937"/>
                 </a:solidFill>
@@ -11310,7 +11310,7 @@
               <a:buNone/>
             </a:pPr>
             <a:r>
-              <a:rPr lang="ko-KR" altLang="en-US" sz="8700" b="1" dirty="0">
+              <a:rPr lang="en-US" altLang="ko-KR" sz="8700" b="1" dirty="0">
                 <a:solidFill>
                   <a:srgbClr val="1F2937"/>
                 </a:solidFill>
@@ -11609,7 +11609,7 @@
               <a:buNone/>
             </a:pPr>
             <a:r>
-              <a:rPr lang="ko-KR" altLang="en-US" sz="8700" b="1" dirty="0">
+              <a:rPr lang="en-US" altLang="ko-KR" sz="8700" b="1" dirty="0">
                 <a:solidFill>
                   <a:srgbClr val="1F2937"/>
                 </a:solidFill>
@@ -11656,7 +11656,7 @@
               <a:buNone/>
             </a:pPr>
             <a:r>
-              <a:rPr lang="ko-KR" altLang="en-US" sz="8700" b="1" dirty="0">
+              <a:rPr lang="en-US" altLang="ko-KR" sz="8700" b="1" dirty="0">
                 <a:solidFill>
                   <a:srgbClr val="1F2937"/>
                 </a:solidFill>
@@ -11955,7 +11955,7 @@
               <a:buNone/>
             </a:pPr>
             <a:r>
-              <a:rPr lang="ko-KR" altLang="en-US" sz="8700" b="1" dirty="0">
+              <a:rPr lang="en-US" altLang="ko-KR" sz="8700" b="1" dirty="0">
                 <a:solidFill>
                   <a:srgbClr val="1F2937"/>
                 </a:solidFill>
@@ -12002,7 +12002,7 @@
               <a:buNone/>
             </a:pPr>
             <a:r>
-              <a:rPr lang="ko-KR" altLang="en-US" sz="8700" b="1" dirty="0">
+              <a:rPr lang="en-US" altLang="ko-KR" sz="8700" b="1" dirty="0">
                 <a:solidFill>
                   <a:srgbClr val="1F2937"/>
                 </a:solidFill>
@@ -12271,7 +12271,7 @@
               <a:buNone/>
             </a:pPr>
             <a:r>
-              <a:rPr lang="ko-KR" altLang="en-US" sz="2900" b="1" dirty="0">
+              <a:rPr lang="en-US" altLang="ko-KR" sz="2900" b="1" dirty="0">
                 <a:solidFill>
                   <a:srgbClr val="1F2937"/>
                 </a:solidFill>
@@ -12318,7 +12318,7 @@
               <a:buNone/>
             </a:pPr>
             <a:r>
-              <a:rPr lang="ko-KR" altLang="en-US" sz="2900" b="1" dirty="0">
+              <a:rPr lang="en-US" altLang="ko-KR" sz="2900" b="1" dirty="0">
                 <a:solidFill>
                   <a:srgbClr val="1F2937"/>
                 </a:solidFill>
@@ -12365,7 +12365,7 @@
               <a:buNone/>
             </a:pPr>
             <a:r>
-              <a:rPr lang="ko-KR" altLang="en-US" sz="2900" b="1" dirty="0">
+              <a:rPr lang="en-US" altLang="ko-KR" sz="2900" b="1" dirty="0">
                 <a:solidFill>
                   <a:srgbClr val="1F2937"/>
                 </a:solidFill>
@@ -12412,7 +12412,7 @@
               <a:buNone/>
             </a:pPr>
             <a:r>
-              <a:rPr lang="ko-KR" altLang="en-US" sz="2900" b="1" dirty="0">
+              <a:rPr lang="en-US" altLang="ko-KR" sz="2900" b="1" dirty="0">
                 <a:solidFill>
                   <a:srgbClr val="1F2937"/>
                 </a:solidFill>
@@ -12459,7 +12459,7 @@
               <a:buNone/>
             </a:pPr>
             <a:r>
-              <a:rPr lang="ko-KR" altLang="en-US" sz="2900" b="1" dirty="0">
+              <a:rPr lang="en-US" altLang="ko-KR" sz="2900" b="1" dirty="0">
                 <a:solidFill>
                   <a:srgbClr val="1F2937"/>
                 </a:solidFill>
@@ -12506,7 +12506,7 @@
               <a:buNone/>
             </a:pPr>
             <a:r>
-              <a:rPr lang="ko-KR" altLang="en-US" sz="2900" b="1" dirty="0">
+              <a:rPr lang="en-US" altLang="ko-KR" sz="2900" b="1" dirty="0">
                 <a:solidFill>
                   <a:srgbClr val="1F2937"/>
                 </a:solidFill>
@@ -12553,7 +12553,7 @@
               <a:buNone/>
             </a:pPr>
             <a:r>
-              <a:rPr lang="ko-KR" altLang="en-US" sz="2900" b="1" dirty="0">
+              <a:rPr lang="en-US" altLang="ko-KR" sz="2900" b="1" dirty="0">
                 <a:solidFill>
                   <a:srgbClr val="1F2937"/>
                 </a:solidFill>
@@ -12600,7 +12600,7 @@
               <a:buNone/>
             </a:pPr>
             <a:r>
-              <a:rPr lang="ko-KR" altLang="en-US" sz="2900" b="1" dirty="0">
+              <a:rPr lang="en-US" altLang="ko-KR" sz="2900" b="1" dirty="0">
                 <a:solidFill>
                   <a:srgbClr val="1F2937"/>
                 </a:solidFill>
@@ -12647,7 +12647,7 @@
               <a:buNone/>
             </a:pPr>
             <a:r>
-              <a:rPr lang="ko-KR" altLang="en-US" sz="2900" b="1" dirty="0">
+              <a:rPr lang="en-US" altLang="ko-KR" sz="2900" b="1" dirty="0">
                 <a:solidFill>
                   <a:srgbClr val="1F2937"/>
                 </a:solidFill>
@@ -12694,7 +12694,7 @@
               <a:buNone/>
             </a:pPr>
             <a:r>
-              <a:rPr lang="ko-KR" altLang="en-US" sz="2900" b="1" dirty="0">
+              <a:rPr lang="en-US" altLang="ko-KR" sz="2900" b="1" dirty="0">
                 <a:solidFill>
                   <a:srgbClr val="1F2937"/>
                 </a:solidFill>
@@ -12741,7 +12741,7 @@
               <a:buNone/>
             </a:pPr>
             <a:r>
-              <a:rPr lang="ko-KR" altLang="en-US" sz="2900" b="1" dirty="0">
+              <a:rPr lang="en-US" altLang="ko-KR" sz="2900" b="1" dirty="0">
                 <a:solidFill>
                   <a:srgbClr val="1F2937"/>
                 </a:solidFill>
@@ -12788,7 +12788,7 @@
               <a:buNone/>
             </a:pPr>
             <a:r>
-              <a:rPr lang="ko-KR" altLang="en-US" sz="2900" b="1" dirty="0">
+              <a:rPr lang="en-US" altLang="ko-KR" sz="2900" b="1" dirty="0">
                 <a:solidFill>
                   <a:srgbClr val="1F2937"/>
                 </a:solidFill>
@@ -12835,7 +12835,7 @@
               <a:buNone/>
             </a:pPr>
             <a:r>
-              <a:rPr lang="ko-KR" altLang="en-US" sz="2900" b="1" dirty="0">
+              <a:rPr lang="en-US" altLang="ko-KR" sz="2900" b="1" dirty="0">
                 <a:solidFill>
                   <a:srgbClr val="1F2937"/>
                 </a:solidFill>
@@ -12882,7 +12882,7 @@
               <a:buNone/>
             </a:pPr>
             <a:r>
-              <a:rPr lang="ko-KR" altLang="en-US" sz="2900" b="1" dirty="0">
+              <a:rPr lang="en-US" altLang="ko-KR" sz="2900" b="1" dirty="0">
                 <a:solidFill>
                   <a:srgbClr val="1F2937"/>
                 </a:solidFill>
@@ -12929,7 +12929,7 @@
               <a:buNone/>
             </a:pPr>
             <a:r>
-              <a:rPr lang="ko-KR" altLang="en-US" sz="2900" b="1" dirty="0">
+              <a:rPr lang="en-US" altLang="ko-KR" sz="2900" b="1" dirty="0">
                 <a:solidFill>
                   <a:srgbClr val="1F2937"/>
                 </a:solidFill>
@@ -12976,7 +12976,7 @@
               <a:buNone/>
             </a:pPr>
             <a:r>
-              <a:rPr lang="ko-KR" altLang="en-US" sz="2900" b="1" dirty="0">
+              <a:rPr lang="en-US" altLang="ko-KR" sz="2900" b="1" dirty="0">
                 <a:solidFill>
                   <a:srgbClr val="1F2937"/>
                 </a:solidFill>
@@ -13023,7 +13023,7 @@
               <a:buNone/>
             </a:pPr>
             <a:r>
-              <a:rPr lang="ko-KR" altLang="en-US" sz="2900" b="1" dirty="0">
+              <a:rPr lang="en-US" altLang="ko-KR" sz="2900" b="1" dirty="0">
                 <a:solidFill>
                   <a:srgbClr val="1F2937"/>
                 </a:solidFill>
@@ -13070,7 +13070,7 @@
               <a:buNone/>
             </a:pPr>
             <a:r>
-              <a:rPr lang="ko-KR" altLang="en-US" sz="2900" b="1" dirty="0">
+              <a:rPr lang="en-US" altLang="ko-KR" sz="2900" b="1" dirty="0">
                 <a:solidFill>
                   <a:srgbClr val="1F2937"/>
                 </a:solidFill>
@@ -13117,7 +13117,7 @@
               <a:buNone/>
             </a:pPr>
             <a:r>
-              <a:rPr lang="ko-KR" altLang="en-US" sz="2900" b="1" dirty="0">
+              <a:rPr lang="en-US" altLang="ko-KR" sz="2900" b="1" dirty="0">
                 <a:solidFill>
                   <a:srgbClr val="1F2937"/>
                 </a:solidFill>
@@ -13164,7 +13164,7 @@
               <a:buNone/>
             </a:pPr>
             <a:r>
-              <a:rPr lang="ko-KR" altLang="en-US" sz="2900" b="1" dirty="0">
+              <a:rPr lang="en-US" altLang="ko-KR" sz="2900" b="1" dirty="0">
                 <a:solidFill>
                   <a:srgbClr val="1F2937"/>
                 </a:solidFill>
@@ -13211,7 +13211,7 @@
               <a:buNone/>
             </a:pPr>
             <a:r>
-              <a:rPr lang="ko-KR" altLang="en-US" sz="2900" b="1" dirty="0">
+              <a:rPr lang="en-US" altLang="ko-KR" sz="2900" b="1" dirty="0">
                 <a:solidFill>
                   <a:srgbClr val="1F2937"/>
                 </a:solidFill>
@@ -13258,7 +13258,7 @@
               <a:buNone/>
             </a:pPr>
             <a:r>
-              <a:rPr lang="ko-KR" altLang="en-US" sz="2900" b="1" dirty="0">
+              <a:rPr lang="en-US" altLang="ko-KR" sz="2900" b="1" dirty="0">
                 <a:solidFill>
                   <a:srgbClr val="1F2937"/>
                 </a:solidFill>
@@ -13305,7 +13305,7 @@
               <a:buNone/>
             </a:pPr>
             <a:r>
-              <a:rPr lang="ko-KR" altLang="en-US" sz="2900" b="1" dirty="0">
+              <a:rPr lang="en-US" altLang="ko-KR" sz="2900" b="1" dirty="0">
                 <a:solidFill>
                   <a:srgbClr val="1F2937"/>
                 </a:solidFill>
@@ -13352,7 +13352,7 @@
               <a:buNone/>
             </a:pPr>
             <a:r>
-              <a:rPr lang="ko-KR" altLang="en-US" sz="2900" b="1" dirty="0">
+              <a:rPr lang="en-US" altLang="ko-KR" sz="2900" b="1" dirty="0">
                 <a:solidFill>
                   <a:srgbClr val="1F2937"/>
                 </a:solidFill>
@@ -13399,7 +13399,7 @@
               <a:buNone/>
             </a:pPr>
             <a:r>
-              <a:rPr lang="ko-KR" altLang="en-US" sz="2900" b="1" dirty="0">
+              <a:rPr lang="en-US" altLang="ko-KR" sz="2900" b="1" dirty="0">
                 <a:solidFill>
                   <a:srgbClr val="1F2937"/>
                 </a:solidFill>
@@ -13446,7 +13446,7 @@
               <a:buNone/>
             </a:pPr>
             <a:r>
-              <a:rPr lang="ko-KR" altLang="en-US" sz="2900" b="1" dirty="0">
+              <a:rPr lang="en-US" altLang="ko-KR" sz="2900" b="1" dirty="0">
                 <a:solidFill>
                   <a:srgbClr val="1F2937"/>
                 </a:solidFill>

--- a/dist/초3/영어/소리와문자/초3_영어_소리와문자_02_알파벳N부터Z까지.pptx
+++ b/dist/초3/영어/소리와문자/초3_영어_소리와문자_02_알파벳N부터Z까지.pptx
@@ -123,13 +123,13 @@
   <p:extLst>
     <p:ext uri="{521415D9-36F7-43E2-AB2F-B90AF26B5E84}">
       <p14:sectionLst xmlns:p14="http://schemas.microsoft.com/office/powerpoint/2010/main">
-        <p14:section name="도입" id="{abae5b43-a427-64a0-8867-a9e57e2b53d8}">
+        <p14:section name="도입" id="{f4c7d704-2135-3936-c79b-f4852c7e395a}">
           <p14:sldIdLst>
             <p14:sldId id="256"/>
             <p14:sldId id="257"/>
           </p14:sldIdLst>
         </p14:section>
-        <p14:section name="개념" id="{707c9c0c-4dbd-a00a-6b29-bda1715ae5cb}">
+        <p14:section name="개념" id="{7721a452-9923-5926-bb75-8f0b6206c2ea}">
           <p14:sldIdLst>
             <p14:sldId id="258"/>
             <p14:sldId id="259"/>
@@ -140,26 +140,26 @@
             <p14:sldId id="264"/>
           </p14:sldIdLst>
         </p14:section>
-        <p14:section name="연습" id="{e82e6f4e-115d-2ae4-616d-bca77afda6c4}">
+        <p14:section name="연습" id="{ac80e039-9e5c-4ff5-26e4-008dac7f614d}">
           <p14:sldIdLst>
             <p14:sldId id="265"/>
             <p14:sldId id="266"/>
             <p14:sldId id="267"/>
           </p14:sldIdLst>
         </p14:section>
-        <p14:section name="확인" id="{817e3ce8-bda2-375a-1f6c-c3845efc190a}">
+        <p14:section name="확인" id="{9213e92e-724f-4a42-d063-b6b22594e966}">
           <p14:sldIdLst>
             <p14:sldId id="268"/>
             <p14:sldId id="269"/>
             <p14:sldId id="270"/>
           </p14:sldIdLst>
         </p14:section>
-        <p14:section name="정리" id="{df7065aa-1ad2-ac66-eea9-665b67e41238}">
+        <p14:section name="정리" id="{a00c4213-3110-ed4d-a580-07d353998cf1}">
           <p14:sldIdLst>
             <p14:sldId id="271"/>
           </p14:sldIdLst>
         </p14:section>
-        <p14:section name="보충" id="{562d48c8-bdcc-f86d-459d-02293389fe83}">
+        <p14:section name="보충" id="{a082dde7-7f57-86f9-86c0-79730bc06a57}">
           <p14:sldIdLst>
             <p14:sldId id="272"/>
           </p14:sldIdLst>
